--- a/Report/Report_1011.pptx
+++ b/Report/Report_1011.pptx
@@ -13,7 +13,7 @@
     <p:sldId id="287" r:id="rId6"/>
     <p:sldId id="282" r:id="rId7"/>
     <p:sldId id="283" r:id="rId8"/>
-    <p:sldId id="276" r:id="rId9"/>
+    <p:sldId id="288" r:id="rId9"/>
     <p:sldId id="275" r:id="rId10"/>
     <p:sldId id="271" r:id="rId11"/>
     <p:sldId id="272" r:id="rId12"/>
@@ -6346,6 +6346,78 @@
           </a:p>
         </p:txBody>
       </p:sp>
+      <p:pic>
+        <p:nvPicPr>
+          <p:cNvPr id="9" name="图片 8" descr="TRIAL_Size_4cm_20261011_145939"/>
+          <p:cNvPicPr>
+            <a:picLocks noChangeAspect="1"/>
+          </p:cNvPicPr>
+          <p:nvPr/>
+        </p:nvPicPr>
+        <p:blipFill>
+          <a:blip r:embed="rId1"/>
+          <a:stretch>
+            <a:fillRect/>
+          </a:stretch>
+        </p:blipFill>
+        <p:spPr>
+          <a:xfrm>
+            <a:off x="3893820" y="4570730"/>
+            <a:ext cx="5249545" cy="2249170"/>
+          </a:xfrm>
+          <a:prstGeom prst="rect">
+            <a:avLst/>
+          </a:prstGeom>
+        </p:spPr>
+      </p:pic>
+      <p:pic>
+        <p:nvPicPr>
+          <p:cNvPr id="10" name="图片 9" descr="TRIAL_Size_2cm_20261006_193241"/>
+          <p:cNvPicPr>
+            <a:picLocks noChangeAspect="1"/>
+          </p:cNvPicPr>
+          <p:nvPr/>
+        </p:nvPicPr>
+        <p:blipFill>
+          <a:blip r:embed="rId2"/>
+          <a:stretch>
+            <a:fillRect/>
+          </a:stretch>
+        </p:blipFill>
+        <p:spPr>
+          <a:xfrm>
+            <a:off x="3893820" y="2304415"/>
+            <a:ext cx="5249545" cy="2249170"/>
+          </a:xfrm>
+          <a:prstGeom prst="rect">
+            <a:avLst/>
+          </a:prstGeom>
+        </p:spPr>
+      </p:pic>
+      <p:pic>
+        <p:nvPicPr>
+          <p:cNvPr id="11" name="图片 10" descr="TRIAL_Size_3cm_20261006_161446"/>
+          <p:cNvPicPr>
+            <a:picLocks noChangeAspect="1"/>
+          </p:cNvPicPr>
+          <p:nvPr/>
+        </p:nvPicPr>
+        <p:blipFill>
+          <a:blip r:embed="rId3"/>
+          <a:stretch>
+            <a:fillRect/>
+          </a:stretch>
+        </p:blipFill>
+        <p:spPr>
+          <a:xfrm>
+            <a:off x="3893185" y="53975"/>
+            <a:ext cx="5250180" cy="2250440"/>
+          </a:xfrm>
+          <a:prstGeom prst="rect">
+            <a:avLst/>
+          </a:prstGeom>
+        </p:spPr>
+      </p:pic>
     </p:spTree>
   </p:cSld>
   <p:clrMapOvr>
@@ -6400,6 +6472,7 @@
                 <a:latin typeface="Times New Roman" panose="02020603050405020304"/>
                 <a:ea typeface="Times New Roman" panose="02020603050405020304"/>
                 <a:cs typeface="Times New Roman" panose="02020603050405020304"/>
+                <a:sym typeface="+mn-ea"/>
               </a:rPr>
               <a:t>Generalization Test</a:t>
             </a:r>
@@ -6411,281 +6484,81 @@
           </a:p>
         </p:txBody>
       </p:sp>
-      <p:grpSp>
-        <p:nvGrpSpPr>
-          <p:cNvPr id="30" name="组合 29"/>
-          <p:cNvGrpSpPr/>
+      <p:pic>
+        <p:nvPicPr>
+          <p:cNvPr id="9" name="图片 8" descr="C:/MineApp/Code/Multimodal_Imitation_Learning/generalization_20261011_185104_437403/generalization_predictions/TRIAL_Size_2p5cm_20261011_152702.pngTRIAL_Size_2p5cm_20261011_152702"/>
+          <p:cNvPicPr>
+            <a:picLocks noChangeAspect="1"/>
+          </p:cNvPicPr>
           <p:nvPr/>
-        </p:nvGrpSpPr>
-        <p:grpSpPr>
-          <a:xfrm>
-            <a:off x="275590" y="1195705"/>
-            <a:ext cx="8793480" cy="1834515"/>
-            <a:chOff x="434" y="1883"/>
-            <a:chExt cx="13848" cy="2889"/>
-          </a:xfrm>
-        </p:grpSpPr>
-        <p:sp>
-          <p:nvSpPr>
-            <p:cNvPr id="18" name="文本框 17"/>
-            <p:cNvSpPr txBox="1"/>
-            <p:nvPr/>
-          </p:nvSpPr>
-          <p:spPr>
-            <a:xfrm>
-              <a:off x="434" y="1883"/>
-              <a:ext cx="4800" cy="580"/>
-            </a:xfrm>
-            <a:prstGeom prst="rect">
-              <a:avLst/>
-            </a:prstGeom>
-            <a:noFill/>
-          </p:spPr>
-          <p:txBody>
-            <a:bodyPr wrap="square" rtlCol="0">
-              <a:spAutoFit/>
-            </a:bodyPr>
-            <a:p>
-              <a:r>
-                <a:rPr lang="en-US" altLang="zh-CN"/>
-                <a:t>Model</a:t>
-              </a:r>
-              <a:endParaRPr lang="en-US" altLang="zh-CN"/>
-            </a:p>
-          </p:txBody>
-        </p:sp>
-        <p:sp>
-          <p:nvSpPr>
-            <p:cNvPr id="22" name="文本框 21"/>
-            <p:cNvSpPr txBox="1"/>
-            <p:nvPr/>
-          </p:nvSpPr>
-          <p:spPr>
-            <a:xfrm>
-              <a:off x="434" y="2955"/>
-              <a:ext cx="4800" cy="580"/>
-            </a:xfrm>
-            <a:prstGeom prst="rect">
-              <a:avLst/>
-            </a:prstGeom>
-            <a:noFill/>
-          </p:spPr>
-          <p:txBody>
-            <a:bodyPr wrap="square" rtlCol="0">
-              <a:spAutoFit/>
-            </a:bodyPr>
-            <a:p>
-              <a:r>
-                <a:rPr lang="en-US" altLang="zh-CN"/>
-                <a:t>Area only</a:t>
-              </a:r>
-              <a:endParaRPr lang="en-US" altLang="zh-CN"/>
-            </a:p>
-          </p:txBody>
-        </p:sp>
-        <p:sp>
-          <p:nvSpPr>
-            <p:cNvPr id="23" name="文本框 22"/>
-            <p:cNvSpPr txBox="1"/>
-            <p:nvPr/>
-          </p:nvSpPr>
-          <p:spPr>
-            <a:xfrm>
-              <a:off x="434" y="4192"/>
-              <a:ext cx="4800" cy="580"/>
-            </a:xfrm>
-            <a:prstGeom prst="rect">
-              <a:avLst/>
-            </a:prstGeom>
-            <a:noFill/>
-          </p:spPr>
-          <p:txBody>
-            <a:bodyPr wrap="square" rtlCol="0">
-              <a:spAutoFit/>
-            </a:bodyPr>
-            <a:p>
-              <a:r>
-                <a:rPr lang="en-US" altLang="zh-CN"/>
-                <a:t>Area + Acceleration</a:t>
-              </a:r>
-              <a:endParaRPr lang="en-US" altLang="zh-CN"/>
-            </a:p>
-          </p:txBody>
-        </p:sp>
-        <p:sp>
-          <p:nvSpPr>
-            <p:cNvPr id="24" name="文本框 23"/>
-            <p:cNvSpPr txBox="1"/>
-            <p:nvPr/>
-          </p:nvSpPr>
-          <p:spPr>
-            <a:xfrm>
-              <a:off x="4638" y="1884"/>
-              <a:ext cx="4800" cy="580"/>
-            </a:xfrm>
-            <a:prstGeom prst="rect">
-              <a:avLst/>
-            </a:prstGeom>
-            <a:noFill/>
-          </p:spPr>
-          <p:txBody>
-            <a:bodyPr wrap="square" rtlCol="0">
-              <a:spAutoFit/>
-            </a:bodyPr>
-            <a:p>
-              <a:r>
-                <a:rPr lang="en-US" altLang="zh-CN"/>
-                <a:t>Mean RMSE</a:t>
-              </a:r>
-              <a:endParaRPr lang="en-US" altLang="zh-CN"/>
-            </a:p>
-          </p:txBody>
-        </p:sp>
-        <p:sp>
-          <p:nvSpPr>
-            <p:cNvPr id="25" name="文本框 24"/>
-            <p:cNvSpPr txBox="1"/>
-            <p:nvPr/>
-          </p:nvSpPr>
-          <p:spPr>
-            <a:xfrm>
-              <a:off x="8705" y="1884"/>
-              <a:ext cx="5577" cy="580"/>
-            </a:xfrm>
-            <a:prstGeom prst="rect">
-              <a:avLst/>
-            </a:prstGeom>
-          </p:spPr>
-          <p:txBody>
-            <a:bodyPr wrap="square">
-              <a:spAutoFit/>
-            </a:bodyPr>
-            <a:p>
-              <a:r>
-                <a:rPr lang="en-US" altLang="zh-CN"/>
-                <a:t>Mean R² ± Standard Deviation</a:t>
-              </a:r>
-              <a:endParaRPr lang="en-US" altLang="zh-CN"/>
-            </a:p>
-          </p:txBody>
-        </p:sp>
-        <p:sp>
-          <p:nvSpPr>
-            <p:cNvPr id="26" name="文本框 25"/>
-            <p:cNvSpPr txBox="1"/>
-            <p:nvPr/>
-          </p:nvSpPr>
-          <p:spPr>
-            <a:xfrm>
-              <a:off x="4638" y="2955"/>
-              <a:ext cx="4800" cy="580"/>
-            </a:xfrm>
-            <a:prstGeom prst="rect">
-              <a:avLst/>
-            </a:prstGeom>
-            <a:noFill/>
-          </p:spPr>
-          <p:txBody>
-            <a:bodyPr wrap="square" rtlCol="0">
-              <a:spAutoFit/>
-            </a:bodyPr>
-            <a:p>
-              <a:r>
-                <a:rPr lang="en-US" altLang="zh-CN"/>
-                <a:t>45.12px</a:t>
-              </a:r>
-              <a:endParaRPr lang="en-US" altLang="zh-CN"/>
-            </a:p>
-          </p:txBody>
-        </p:sp>
-        <p:sp>
-          <p:nvSpPr>
-            <p:cNvPr id="27" name="文本框 26"/>
-            <p:cNvSpPr txBox="1"/>
-            <p:nvPr/>
-          </p:nvSpPr>
-          <p:spPr>
-            <a:xfrm>
-              <a:off x="4638" y="4192"/>
-              <a:ext cx="4800" cy="580"/>
-            </a:xfrm>
-            <a:prstGeom prst="rect">
-              <a:avLst/>
-            </a:prstGeom>
-            <a:noFill/>
-          </p:spPr>
-          <p:txBody>
-            <a:bodyPr wrap="square" rtlCol="0">
-              <a:spAutoFit/>
-            </a:bodyPr>
-            <a:p>
-              <a:r>
-                <a:rPr lang="en-US" altLang="zh-CN"/>
-                <a:t>21.77px</a:t>
-              </a:r>
-              <a:endParaRPr lang="en-US" altLang="zh-CN"/>
-            </a:p>
-          </p:txBody>
-        </p:sp>
-        <p:sp>
-          <p:nvSpPr>
-            <p:cNvPr id="28" name="文本框 27"/>
-            <p:cNvSpPr txBox="1"/>
-            <p:nvPr/>
-          </p:nvSpPr>
-          <p:spPr>
-            <a:xfrm>
-              <a:off x="8705" y="2955"/>
-              <a:ext cx="4800" cy="580"/>
-            </a:xfrm>
-            <a:prstGeom prst="rect">
-              <a:avLst/>
-            </a:prstGeom>
-            <a:noFill/>
-          </p:spPr>
-          <p:txBody>
-            <a:bodyPr wrap="square" rtlCol="0">
-              <a:spAutoFit/>
-            </a:bodyPr>
-            <a:p>
-              <a:r>
-                <a:rPr lang="en-US" altLang="zh-CN"/>
-                <a:t>0.647 ± 0.069</a:t>
-              </a:r>
-              <a:endParaRPr lang="en-US" altLang="zh-CN"/>
-            </a:p>
-          </p:txBody>
-        </p:sp>
-        <p:sp>
-          <p:nvSpPr>
-            <p:cNvPr id="29" name="文本框 28"/>
-            <p:cNvSpPr txBox="1"/>
-            <p:nvPr/>
-          </p:nvSpPr>
-          <p:spPr>
-            <a:xfrm>
-              <a:off x="8705" y="4192"/>
-              <a:ext cx="5577" cy="580"/>
-            </a:xfrm>
-            <a:prstGeom prst="rect">
-              <a:avLst/>
-            </a:prstGeom>
-            <a:noFill/>
-          </p:spPr>
-          <p:txBody>
-            <a:bodyPr wrap="square" rtlCol="0" anchor="t">
-              <a:spAutoFit/>
-            </a:bodyPr>
-            <a:p>
-              <a:r>
-                <a:rPr lang="en-US" altLang="zh-CN"/>
-                <a:t>0.917 ± 0.040</a:t>
-              </a:r>
-              <a:endParaRPr lang="en-US" altLang="zh-CN"/>
-            </a:p>
-          </p:txBody>
-        </p:sp>
-      </p:grpSp>
+        </p:nvPicPr>
+        <p:blipFill>
+          <a:blip r:embed="rId1"/>
+          <a:srcRect t="18" b="18"/>
+          <a:stretch>
+            <a:fillRect/>
+          </a:stretch>
+        </p:blipFill>
+        <p:spPr>
+          <a:xfrm>
+            <a:off x="3893820" y="4570730"/>
+            <a:ext cx="5249545" cy="2249170"/>
+          </a:xfrm>
+          <a:prstGeom prst="rect">
+            <a:avLst/>
+          </a:prstGeom>
+        </p:spPr>
+      </p:pic>
+      <p:pic>
+        <p:nvPicPr>
+          <p:cNvPr id="10" name="图片 9" descr="C:/MineApp/Code/Multimodal_Imitation_Learning/generalization_20261011_185104_437403/generalization_predictions/TRIAL_Size_3p5cm_20261011_151707.pngTRIAL_Size_3p5cm_20261011_151707"/>
+          <p:cNvPicPr>
+            <a:picLocks noChangeAspect="1"/>
+          </p:cNvPicPr>
+          <p:nvPr/>
+        </p:nvPicPr>
+        <p:blipFill>
+          <a:blip r:embed="rId2"/>
+          <a:srcRect t="18" b="18"/>
+          <a:stretch>
+            <a:fillRect/>
+          </a:stretch>
+        </p:blipFill>
+        <p:spPr>
+          <a:xfrm>
+            <a:off x="3893820" y="2304415"/>
+            <a:ext cx="5249545" cy="2249170"/>
+          </a:xfrm>
+          <a:prstGeom prst="rect">
+            <a:avLst/>
+          </a:prstGeom>
+        </p:spPr>
+      </p:pic>
+      <p:pic>
+        <p:nvPicPr>
+          <p:cNvPr id="11" name="图片 10" descr="C:/MineApp/Code/Multimodal_Imitation_Learning/generalization_20261011_185104_437403/generalization_predictions/TRIAL_Size_4p5cm_20261007_104705.pngTRIAL_Size_4p5cm_20261007_104705"/>
+          <p:cNvPicPr>
+            <a:picLocks noChangeAspect="1"/>
+          </p:cNvPicPr>
+          <p:nvPr/>
+        </p:nvPicPr>
+        <p:blipFill>
+          <a:blip r:embed="rId3"/>
+          <a:srcRect l="28"/>
+          <a:stretch>
+            <a:fillRect/>
+          </a:stretch>
+        </p:blipFill>
+        <p:spPr>
+          <a:xfrm>
+            <a:off x="3893185" y="53975"/>
+            <a:ext cx="5250180" cy="2250440"/>
+          </a:xfrm>
+          <a:prstGeom prst="rect">
+            <a:avLst/>
+          </a:prstGeom>
+        </p:spPr>
+      </p:pic>
     </p:spTree>
   </p:cSld>
   <p:clrMapOvr>
@@ -6751,30 +6624,6 @@
           </a:p>
         </p:txBody>
       </p:sp>
-      <p:pic>
-        <p:nvPicPr>
-          <p:cNvPr id="9" name="图片 8" descr="TRIAL_Size_4cm_20261010_163935"/>
-          <p:cNvPicPr>
-            <a:picLocks noChangeAspect="1"/>
-          </p:cNvPicPr>
-          <p:nvPr/>
-        </p:nvPicPr>
-        <p:blipFill>
-          <a:blip r:embed="rId1"/>
-          <a:stretch>
-            <a:fillRect/>
-          </a:stretch>
-        </p:blipFill>
-        <p:spPr>
-          <a:xfrm>
-            <a:off x="0" y="1469390"/>
-            <a:ext cx="9144000" cy="3918585"/>
-          </a:xfrm>
-          <a:prstGeom prst="rect">
-            <a:avLst/>
-          </a:prstGeom>
-        </p:spPr>
-      </p:pic>
     </p:spTree>
   </p:cSld>
   <p:clrMapOvr>
